--- a/Interview Trainer Agent.pptx
+++ b/Interview Trainer Agent.pptx
@@ -12462,27 +12462,35 @@
                 <a:cs typeface="Times New Roman"/>
                 <a:sym typeface="Times New Roman"/>
               </a:rPr>
-              <a:t>Hub URL-</a:t>
+              <a:t>Hub URL-  https://github.com/</a:t>
             </a:r>
-          </a:p>
-          <a:p>
-            <a:pPr marL="0" marR="0" lvl="0" indent="0" algn="l" rtl="0">
-              <a:lnSpc>
-                <a:spcPct val="162162"/>
-              </a:lnSpc>
-              <a:spcBef>
-                <a:spcPts val="0"/>
-              </a:spcBef>
-              <a:spcAft>
-                <a:spcPts val="0"/>
-              </a:spcAft>
-              <a:buClr>
-                <a:srgbClr val="2B3541"/>
-              </a:buClr>
-              <a:buSzPts val="1850"/>
-              <a:buFont typeface="Times New Roman"/>
-              <a:buNone/>
-            </a:pPr>
+            <a:r>
+              <a:rPr lang="en-IN" sz="1850" dirty="0" err="1">
+                <a:latin typeface="Times New Roman"/>
+                <a:ea typeface="Times New Roman"/>
+                <a:cs typeface="Times New Roman"/>
+                <a:sym typeface="Times New Roman"/>
+              </a:rPr>
+              <a:t>KonathamManasa</a:t>
+            </a:r>
+            <a:r>
+              <a:rPr lang="en-IN" sz="1850" dirty="0">
+                <a:latin typeface="Times New Roman"/>
+                <a:ea typeface="Times New Roman"/>
+                <a:cs typeface="Times New Roman"/>
+                <a:sym typeface="Times New Roman"/>
+              </a:rPr>
+              <a:t>/Interview-trainer-</a:t>
+            </a:r>
+            <a:r>
+              <a:rPr lang="en-IN" sz="1850" dirty="0" err="1">
+                <a:latin typeface="Times New Roman"/>
+                <a:ea typeface="Times New Roman"/>
+                <a:cs typeface="Times New Roman"/>
+                <a:sym typeface="Times New Roman"/>
+              </a:rPr>
+              <a:t>agent.git</a:t>
+            </a:r>
             <a:endParaRPr sz="1850" b="0" i="0" u="none" strike="noStrike" cap="none" dirty="0">
               <a:solidFill>
                 <a:srgbClr val="000000"/>
